--- a/outputs/lot1_conformite.pptx
+++ b/outputs/lot1_conformite.pptx
@@ -3715,7 +3715,7 @@
                 </a:solidFill>
                 <a:latin typeface="Alegreya Sans"/>
               </a:rPr>
-              <a:t>EXPÉRIENCE PROFESSIONNELLE</a:t>
+              <a:t>PRINCIPALES EXPÉRIENCES PROFESSIONNELLES</a:t>
             </a:r>
           </a:p>
           <a:p>
@@ -4968,7 +4968,7 @@
                 </a:solidFill>
                 <a:latin typeface="Alegreya Sans"/>
               </a:rPr>
-              <a:t>PROFESSIONAL EXPERIENCE</a:t>
+              <a:t>MAIN PROFESSIONAL EXPERIENCE</a:t>
             </a:r>
           </a:p>
           <a:p>
@@ -6202,7 +6202,7 @@
                 </a:solidFill>
                 <a:latin typeface="Alegreya Sans"/>
               </a:rPr>
-              <a:t>EXPÉRIENCE PROFESSIONNELLE</a:t>
+              <a:t>PRINCIPALES EXPÉRIENCES PROFESSIONNELLES</a:t>
             </a:r>
           </a:p>
           <a:p>
@@ -7386,7 +7386,7 @@
                 </a:solidFill>
                 <a:latin typeface="Alegreya Sans"/>
               </a:rPr>
-              <a:t>PROFESSIONAL EXPERIENCE</a:t>
+              <a:t>MAIN PROFESSIONAL EXPERIENCE</a:t>
             </a:r>
           </a:p>
           <a:p>
@@ -8426,7 +8426,7 @@
                 </a:solidFill>
                 <a:latin typeface="Alegreya Sans"/>
               </a:rPr>
-              <a:t>PROFESSIONAL EXPERIENCE</a:t>
+              <a:t>MAIN PROFESSIONAL EXPERIENCE</a:t>
             </a:r>
           </a:p>
           <a:p>
@@ -9669,7 +9669,7 @@
                 </a:solidFill>
                 <a:latin typeface="Alegreya Sans"/>
               </a:rPr>
-              <a:t>EXPÉRIENCE PROFESSIONNELLE</a:t>
+              <a:t>PRINCIPALES EXPÉRIENCES PROFESSIONNELLES</a:t>
             </a:r>
           </a:p>
           <a:p>
@@ -10912,7 +10912,7 @@
                 </a:solidFill>
                 <a:latin typeface="Alegreya Sans"/>
               </a:rPr>
-              <a:t>PROFESSIONAL EXPERIENCE</a:t>
+              <a:t>MAIN PROFESSIONAL EXPERIENCE</a:t>
             </a:r>
           </a:p>
           <a:p>
@@ -12156,7 +12156,7 @@
                 </a:solidFill>
                 <a:latin typeface="Alegreya Sans"/>
               </a:rPr>
-              <a:t>EXPÉRIENCE PROFESSIONNELLE</a:t>
+              <a:t>PRINCIPALES EXPÉRIENCES PROFESSIONNELLES</a:t>
             </a:r>
           </a:p>
           <a:p>
@@ -13365,7 +13365,7 @@
                 </a:solidFill>
                 <a:latin typeface="Alegreya Sans"/>
               </a:rPr>
-              <a:t>PROFESSIONAL EXPERIENCE</a:t>
+              <a:t>MAIN PROFESSIONAL EXPERIENCE</a:t>
             </a:r>
           </a:p>
           <a:p>
@@ -14439,7 +14439,7 @@
                 </a:solidFill>
                 <a:latin typeface="Alegreya Sans"/>
               </a:rPr>
-              <a:t>EXPÉRIENCE PROFESSIONNELLE</a:t>
+              <a:t>PRINCIPALES EXPÉRIENCES PROFESSIONNELLES</a:t>
             </a:r>
           </a:p>
           <a:p>
@@ -15513,7 +15513,7 @@
                 </a:solidFill>
                 <a:latin typeface="Alegreya Sans"/>
               </a:rPr>
-              <a:t>PROFESSIONAL EXPERIENCE</a:t>
+              <a:t>MAIN PROFESSIONAL EXPERIENCE</a:t>
             </a:r>
           </a:p>
           <a:p>
@@ -16766,7 +16766,7 @@
                 </a:solidFill>
                 <a:latin typeface="Alegreya Sans"/>
               </a:rPr>
-              <a:t>EXPÉRIENCE PROFESSIONNELLE</a:t>
+              <a:t>PRINCIPALES EXPÉRIENCES PROFESSIONNELLES</a:t>
             </a:r>
           </a:p>
           <a:p>
